--- a/docs/riskworks-presentation-deck/DavinTrade-Rise-Partnership-Proposal_v2.pptx
+++ b/docs/riskworks-presentation-deck/DavinTrade-Rise-Partnership-Proposal_v2.pptx
@@ -153,7 +153,7 @@
     </p:spTree>
     <p:extLst>
       <p:ext uri="{BB962C8B-B14F-4D97-AF65-F5344CB8AC3E}">
-        <p14:creationId xmlns:p14="http://schemas.microsoft.com/office/powerpoint/2010/main" val="2290085996"/>
+        <p14:creationId xmlns:p14="http://schemas.microsoft.com/office/powerpoint/2010/main" val="685370895"/>
       </p:ext>
     </p:extLst>
   </p:cSld>
@@ -2190,29 +2190,7 @@
                 <a:ea typeface="Calibri" pitchFamily="34" charset="-122"/>
                 <a:cs typeface="Calibri" pitchFamily="34" charset="-120"/>
               </a:rPr>
-              <a:t>money-service integration overview  ·  Parts 12 · 17 · 18 · 19 in </a:t>
-            </a:r>
-            <a:r>
-              <a:rPr lang="en-US" sz="1300" dirty="0" err="1">
-                <a:solidFill>
-                  <a:srgbClr val="8FA3C4"/>
-                </a:solidFill>
-                <a:latin typeface="Calibri" pitchFamily="34" charset="0"/>
-                <a:ea typeface="Calibri" pitchFamily="34" charset="-122"/>
-                <a:cs typeface="Calibri" pitchFamily="34" charset="-120"/>
-              </a:rPr>
-              <a:t>DavinTrade</a:t>
-            </a:r>
-            <a:r>
-              <a:rPr lang="en-US" sz="1300" dirty="0">
-                <a:solidFill>
-                  <a:srgbClr val="8FA3C4"/>
-                </a:solidFill>
-                <a:latin typeface="Calibri" pitchFamily="34" charset="0"/>
-                <a:ea typeface="Calibri" pitchFamily="34" charset="-122"/>
-                <a:cs typeface="Calibri" pitchFamily="34" charset="-120"/>
-              </a:rPr>
-              <a:t> App</a:t>
+              <a:t>money-service integration overview  ·  Parts 12 · 17 · 18 · 19</a:t>
             </a:r>
             <a:endParaRPr lang="en-US" sz="1300" dirty="0"/>
           </a:p>
@@ -4053,7 +4031,7 @@
                 <a:ea typeface="Calibri" pitchFamily="34" charset="-122"/>
                 <a:cs typeface="Calibri" pitchFamily="34" charset="-120"/>
               </a:rPr>
-              <a:t>HMAC-SHA256 webhook handler</a:t>
+              <a:t>Webhook signature verification</a:t>
             </a:r>
             <a:endParaRPr lang="en-US" sz="1350" dirty="0"/>
           </a:p>
@@ -4073,7 +4051,7 @@
                 <a:ea typeface="Calibri" pitchFamily="34" charset="-122"/>
                 <a:cs typeface="Calibri" pitchFamily="34" charset="-120"/>
               </a:rPr>
-              <a:t>Verifies every Rise event before it's processed.</a:t>
+              <a:t>Implemented today; being finalized against Rise's current v2 spec.</a:t>
             </a:r>
             <a:endParaRPr lang="en-US" sz="1350" dirty="0"/>
           </a:p>
@@ -4808,7 +4786,7 @@
                 <a:ea typeface="Calibri" pitchFamily="34" charset="-122"/>
                 <a:cs typeface="Calibri" pitchFamily="34" charset="-120"/>
               </a:rPr>
-              <a:t>HMAC-SHA256 verification on every webhook</a:t>
+              <a:t>HMAC-SHA256 verification on Stripe &amp; dLocal webhooks</a:t>
             </a:r>
             <a:endParaRPr lang="en-US" sz="1450" dirty="0"/>
           </a:p>
@@ -4828,7 +4806,7 @@
                 <a:ea typeface="Calibri" pitchFamily="34" charset="-122"/>
                 <a:cs typeface="Calibri" pitchFamily="34" charset="-120"/>
               </a:rPr>
-              <a:t>Stripe, dLocal, and Rise payloads are all signature-verified before processing.</a:t>
+              <a:t>Both signature-verified before processing; Rise verification is being finalized against their current v2 spec.</a:t>
             </a:r>
             <a:endParaRPr lang="en-US" sz="1450" dirty="0"/>
           </a:p>
@@ -6036,7 +6014,7 @@
                 <a:ea typeface="Calibri" pitchFamily="34" charset="-122"/>
                 <a:cs typeface="Calibri" pitchFamily="34" charset="-120"/>
               </a:rPr>
-              <a:t>The full disbursement pipeline — batching, retries, reconciliation, admin tooling — is built and tested end-to-end against Rise's published API surface. The only remaining gap is live production access.</a:t>
+              <a:t>The full disbursement pipeline — batching, retries, reconciliation, admin tooling — is built and tested end-to-end against a mock-provider harness. What's left: live production access, and confirming our webhook verification matches Rise's current v2 spec.</a:t>
             </a:r>
             <a:endParaRPr lang="en-US" sz="1400" dirty="0"/>
           </a:p>
@@ -6287,7 +6265,7 @@
                 <a:ea typeface="Calibri" pitchFamily="34" charset="-122"/>
                 <a:cs typeface="Calibri" pitchFamily="34" charset="-120"/>
               </a:rPr>
-              <a:t>Production API credentials</a:t>
+              <a:t>Enable our company for B2B API — both environments</a:t>
             </a:r>
             <a:endParaRPr lang="en-US" sz="1550" dirty="0"/>
           </a:p>
@@ -6307,7 +6285,7 @@
                 <a:ea typeface="Calibri" pitchFamily="34" charset="-122"/>
                 <a:cs typeface="Calibri" pitchFamily="34" charset="-120"/>
               </a:rPr>
-              <a:t>Wallet keys and SIWE app registration for the live environment.</a:t>
+              <a:t>A support request with our company name + RiseID; staging and production are enabled separately.</a:t>
             </a:r>
             <a:endParaRPr lang="en-US" sz="1550" dirty="0"/>
           </a:p>
@@ -6408,7 +6386,7 @@
                 <a:ea typeface="Calibri" pitchFamily="34" charset="-122"/>
                 <a:cs typeface="Calibri" pitchFamily="34" charset="-120"/>
               </a:rPr>
-              <a:t>A registered production webhook endpoint + signing secret</a:t>
+              <a:t>Clarity on webhooks v1 vs. v2</a:t>
             </a:r>
             <a:endParaRPr lang="en-US" sz="1550" dirty="0"/>
           </a:p>
@@ -6428,7 +6406,7 @@
                 <a:ea typeface="Calibri" pitchFamily="34" charset="-122"/>
                 <a:cs typeface="Calibri" pitchFamily="34" charset="-120"/>
               </a:rPr>
-              <a:t>So Rise events reach our handler and can be verified.</a:t>
+              <a:t>Your docs reference both — confirm which we should target, the current event schema, and v1's retirement timeline.</a:t>
             </a:r>
             <a:endParaRPr lang="en-US" sz="1550" dirty="0"/>
           </a:p>
@@ -6529,7 +6507,7 @@
                 <a:ea typeface="Calibri" pitchFamily="34" charset="-122"/>
                 <a:cs typeface="Calibri" pitchFamily="34" charset="-120"/>
               </a:rPr>
-              <a:t>Confirmation of the webhook payload &amp; signature spec</a:t>
+              <a:t>A production webhook signing secret, once on v2</a:t>
             </a:r>
             <a:endParaRPr lang="en-US" sz="1550" dirty="0"/>
           </a:p>
@@ -6549,7 +6527,7 @@
                 <a:ea typeface="Calibri" pitchFamily="34" charset="-122"/>
                 <a:cs typeface="Calibri" pitchFamily="34" charset="-120"/>
               </a:rPr>
-              <a:t>Needed to complete our signed-payload replay testing before cutover.</a:t>
+              <a:t>Plus the exact signature header format, so we verify events against the right spec.</a:t>
             </a:r>
             <a:endParaRPr lang="en-US" sz="1550" dirty="0"/>
           </a:p>
@@ -7051,7 +7029,7 @@
                 <a:ea typeface="Calibri" pitchFamily="34" charset="-122"/>
                 <a:cs typeface="Calibri" pitchFamily="34" charset="-120"/>
               </a:rPr>
-              <a:t>Credential Exchange</a:t>
+              <a:t>Environment Enablement</a:t>
             </a:r>
             <a:endParaRPr lang="en-US" sz="1500" dirty="0"/>
           </a:p>
@@ -7093,7 +7071,7 @@
                 <a:ea typeface="Calibri" pitchFamily="34" charset="-122"/>
                 <a:cs typeface="Calibri" pitchFamily="34" charset="-120"/>
               </a:rPr>
-              <a:t>Sandbox validation with production-shaped credentials</a:t>
+              <a:t>Company enabled for staging + production; our API wallet authorized</a:t>
             </a:r>
             <a:endParaRPr lang="en-US" sz="1150" dirty="0"/>
           </a:p>
@@ -7203,7 +7181,7 @@
                 <a:ea typeface="Calibri" pitchFamily="34" charset="-122"/>
                 <a:cs typeface="Calibri" pitchFamily="34" charset="-120"/>
               </a:rPr>
-              <a:t>Webhook Replay Testing</a:t>
+              <a:t>Webhook Spec Confirmation</a:t>
             </a:r>
             <a:endParaRPr lang="en-US" sz="1500" dirty="0"/>
           </a:p>
@@ -7245,7 +7223,7 @@
                 <a:ea typeface="Calibri" pitchFamily="34" charset="-122"/>
                 <a:cs typeface="Calibri" pitchFamily="34" charset="-120"/>
               </a:rPr>
-              <a:t>Verify signature handling against real signed payloads</a:t>
+              <a:t>Confirm v2 event schema &amp; secret; test against real signed payloads</a:t>
             </a:r>
             <a:endParaRPr lang="en-US" sz="1150" dirty="0"/>
           </a:p>
@@ -10917,12 +10895,7 @@
             <a:endParaRPr lang="en-US" sz="1300" dirty="0"/>
           </a:p>
           <a:p>
-            <a:pPr marL="0" indent="0" algn="l">
-              <a:lnSpc>
-                <a:spcPct val="108000"/>
-              </a:lnSpc>
-              <a:buNone/>
-            </a:pPr>
+            <a:pPr algn="l"/>
             <a:r>
               <a:rPr lang="en-US" sz="1050" dirty="0">
                 <a:solidFill>
@@ -10932,9 +10905,38 @@
                 <a:ea typeface="Calibri" pitchFamily="34" charset="-122"/>
                 <a:cs typeface="Calibri" pitchFamily="34" charset="-120"/>
               </a:rPr>
-              <a:t>Past analyses are kept and revisited anytime (Remark : XAUUSD is only symbol initially lunched in introductory phase while Cryptos, Forex, equities would be added in later phases).</a:t>
-            </a:r>
-            <a:endParaRPr lang="en-US" sz="1300" dirty="0"/>
+              <a:t>Past analyses are kept and revisited anytime </a:t>
+            </a:r>
+            <a:endParaRPr lang="en-TZ" sz="1800" b="0" i="0" u="none" strike="noStrike" baseline="0" dirty="0">
+              <a:solidFill>
+                <a:srgbClr val="000000"/>
+              </a:solidFill>
+              <a:latin typeface="Calibri" panose="020F0502020204030204" pitchFamily="34" charset="0"/>
+            </a:endParaRPr>
+          </a:p>
+          <a:p>
+            <a:pPr marR="106990" algn="l"/>
+            <a:r>
+              <a:rPr lang="en-US" sz="1050" b="0" i="0" u="none" strike="noStrike" baseline="0" dirty="0">
+                <a:solidFill>
+                  <a:srgbClr val="5B6B82"/>
+                </a:solidFill>
+                <a:latin typeface="Calibri" panose="020F0502020204030204" pitchFamily="34" charset="0"/>
+              </a:rPr>
+              <a:t>(Remark : XAUUSD is only symbol initially lunched in introductory phase while Cryptos, Forex, equities would be added in later phases)</a:t>
+            </a:r>
+            <a:r>
+              <a:rPr lang="en-US" sz="1050" dirty="0">
+                <a:solidFill>
+                  <a:srgbClr val="5B6B82"/>
+                </a:solidFill>
+                <a:latin typeface="Calibri" pitchFamily="34" charset="0"/>
+                <a:ea typeface="Calibri" pitchFamily="34" charset="-122"/>
+                <a:cs typeface="Calibri" pitchFamily="34" charset="-120"/>
+              </a:rPr>
+              <a:t>.</a:t>
+            </a:r>
+            <a:endParaRPr lang="en-US" sz="1050" dirty="0"/>
           </a:p>
         </p:txBody>
       </p:sp>
@@ -14537,7 +14539,7 @@
                 <a:ea typeface="Cambria" pitchFamily="34" charset="-122"/>
                 <a:cs typeface="Cambria" pitchFamily="34" charset="-120"/>
               </a:rPr>
-              <a:t>$500M+</a:t>
+              <a:t>$650M+</a:t>
             </a:r>
             <a:endParaRPr lang="en-US" sz="2400" dirty="0"/>
           </a:p>
@@ -14757,7 +14759,7 @@
                 <a:ea typeface="Cambria" pitchFamily="34" charset="-122"/>
                 <a:cs typeface="Cambria" pitchFamily="34" charset="-120"/>
               </a:rPr>
-              <a:t>90+</a:t>
+              <a:t>90+ / 100+</a:t>
             </a:r>
             <a:endParaRPr lang="en-US" sz="2400" dirty="0"/>
           </a:p>
@@ -14799,7 +14801,7 @@
                 <a:ea typeface="Calibri" pitchFamily="34" charset="-122"/>
                 <a:cs typeface="Calibri" pitchFamily="34" charset="-120"/>
               </a:rPr>
-              <a:t>Local currencies, plus stablecoins &amp; crypto</a:t>
+              <a:t>Local currencies / cryptocurrencies supported</a:t>
             </a:r>
             <a:endParaRPr lang="en-US" sz="1100" dirty="0"/>
           </a:p>
